--- a/OCI_Robot_Cloud_GTC2027.pptx
+++ b/OCI_Robot_Cloud_GTC2027.pptx
@@ -5831,7 +5831,7 @@
                 <a:ea typeface="Calibri" pitchFamily="34" charset="-122"/>
                 <a:cs typeface="Calibri" pitchFamily="34" charset="-120"/>
               </a:rPr>
-              <a:t>179ms inference</a:t>
+              <a:t>226ms inference</a:t>
             </a:r>
             <a:endParaRPr lang="en-US" sz="1100" dirty="0"/>
           </a:p>
@@ -10456,7 +10456,7 @@
                 <a:ea typeface="Calibri" pitchFamily="34" charset="-122"/>
                 <a:cs typeface="Calibri" pitchFamily="34" charset="-120"/>
               </a:rPr>
-              <a:t>179ms inference latency</a:t>
+              <a:t>226ms inference latency</a:t>
             </a:r>
             <a:endParaRPr lang="en-US" sz="1150" dirty="0"/>
           </a:p>
@@ -10581,7 +10581,7 @@
                 <a:ea typeface="Calibri" pitchFamily="34" charset="-122"/>
                 <a:cs typeface="Calibri" pitchFamily="34" charset="-120"/>
               </a:rPr>
-              <a:t>179ms</a:t>
+              <a:t>226ms</a:t>
             </a:r>
             <a:endParaRPr lang="en-US" sz="2800" dirty="0"/>
           </a:p>
@@ -12029,7 +12029,7 @@
                 <a:ea typeface="Calibri" pitchFamily="34" charset="-122"/>
                 <a:cs typeface="Calibri" pitchFamily="34" charset="-120"/>
               </a:rPr>
-              <a:t>Training time: ~33 min for 5000 steps</a:t>
+              <a:t>Training time: 35.4 min for 5000 steps</a:t>
             </a:r>
             <a:endParaRPr lang="en-US" sz="1250" dirty="0"/>
           </a:p>
@@ -12873,7 +12873,7 @@
                           <a:ea typeface="Calibri" pitchFamily="34" charset="-122"/>
                           <a:cs typeface="Calibri" pitchFamily="34" charset="-120"/>
                         </a:rPr>
-                        <a:t>TBD*</a:t>
+                        <a:t>5%</a:t>
                       </a:r>
                       <a:endParaRPr lang="en-US" sz="1100" dirty="0">
                         <a:latin typeface="Calibri" charset="0"/>
@@ -13411,7 +13411,7 @@
                 </a:solidFill>
                 <a:latin typeface="Calibri" pitchFamily="34" charset="0"/>
               </a:rPr>
-              <a:t>*closed-loop eval in progress</a:t>
+              <a:t>closed-loop: 1/20 episodes (5%), avg latency 226ms</a:t>
             </a:r>
             <a:endParaRPr lang="en-US" sz="800" dirty="0"/>
           </a:p>
@@ -15571,7 +15571,7 @@
                           <a:ea typeface="Calibri" pitchFamily="34" charset="-122"/>
                           <a:cs typeface="Calibri" pitchFamily="34" charset="-120"/>
                         </a:rPr>
-                        <a:t>~52%*</a:t>
+                        <a:t>52%</a:t>
                       </a:r>
                       <a:endParaRPr lang="en-US" sz="1000" dirty="0">
                         <a:latin typeface="Calibri" charset="0"/>
@@ -15845,7 +15845,7 @@
                           <a:ea typeface="Calibri" pitchFamily="34" charset="-122"/>
                           <a:cs typeface="Calibri" pitchFamily="34" charset="-120"/>
                         </a:rPr>
-                        <a:t>~55%*</a:t>
+                        <a:t>55%</a:t>
                       </a:r>
                       <a:endParaRPr lang="en-US" sz="1000" dirty="0">
                         <a:latin typeface="Calibri" charset="0"/>
@@ -16119,7 +16119,7 @@
                           <a:ea typeface="Calibri" pitchFamily="34" charset="-122"/>
                           <a:cs typeface="Calibri" pitchFamily="34" charset="-120"/>
                         </a:rPr>
-                        <a:t>~65%*</a:t>
+                        <a:t>65%</a:t>
                       </a:r>
                       <a:endParaRPr lang="en-US" sz="1000" dirty="0">
                         <a:latin typeface="Calibri" charset="0"/>
@@ -16276,7 +16276,7 @@
                 <a:ea typeface="Calibri" pitchFamily="34" charset="-122"/>
                 <a:cs typeface="Calibri" pitchFamily="34" charset="-120"/>
               </a:rPr>
-              <a:t>* Collection success rate (policy + expert blended)</a:t>
+              <a:t>Closed-loop success rate (policy autonomous, no expert blending)</a:t>
             </a:r>
             <a:endParaRPr lang="en-US" sz="900" dirty="0"/>
           </a:p>
@@ -17350,7 +17350,7 @@
                 <a:ea typeface="Calibri" pitchFamily="34" charset="-122"/>
                 <a:cs typeface="Calibri" pitchFamily="34" charset="-120"/>
               </a:rPr>
-              <a:t>179ms latency  ·  16-step chunks</a:t>
+              <a:t>226ms latency  ·  16-step chunks</a:t>
             </a:r>
             <a:endParaRPr lang="en-US" sz="1000" dirty="0"/>
           </a:p>
